--- a/Lesson13-PromptLogicPlugins/Lesson13-PromptLogicPlugins.pptx
+++ b/Lesson13-PromptLogicPlugins/Lesson13-PromptLogicPlugins.pptx
@@ -600,7 +600,7 @@
           <a:p>
             <a:r>
               <a:rPr lang="en-US" dirty="0"/>
-              <a:t>Try this on your own. Add a Silver branch to GetTierInstructions with its own tone and a ten percent code, SILVER10, keeping the strings free of quote characters. Then create a second UserProfile for a Silver customer with an empty purchase list and run the prompt for them. Check that Gold and the default tier behave as before, that the Silver reply offers the new code, and that the purchases section says No recent purchases. The key point: you should not have to touch the template at all. All of the change lives in C#.</a:t>
+              <a:t>Try this on your own. Add a Silver branch to GetTierInstructions with its own tone and a ten percent code, SILVER10, keeping the strings free of quote characters. Then, in Program.cs, create a second UserProfile for a Silver customer with an empty purchase list and run the prompt for them. Check that Gold and the default tier behave as before, that the Silver reply offers the new code, and that the purchases section says No recent purchases. The key point: you should not have to touch the template at all. All of the change lives in C#.</a:t>
             </a:r>
             <a:endParaRPr lang="en-US" dirty="0"/>
           </a:p>
@@ -1128,7 +1128,7 @@
           <a:p>
             <a:r>
               <a:rPr lang="en-US" dirty="0"/>
-              <a:t>Here is the flow. The program registers the plugin on the builder and builds the kernel. It creates the sample data: a UserProfile record for Alice, Gold tier, with two Product records, an AI Camera and a Tripod. Product and UserProfile are C# records, which make convenient immutable data carriers. KernelArguments then gets four entries. Note that user is the whole UserProfile object, not a string: the template engine passes it straight to GetPurchaseList, matching the parameter type. Name and tier are simple strings for display, and tier also feeds the tier function. Then one InvokePromptAsync call does two jobs. First, highlighted, it renders the template, calling both plugin functions. Then it sends the finished prompt to the model.</a:t>
+              <a:t>Here is the flow. The program registers the plugin on the builder and builds the kernel. It creates the sample data: a UserProfile record for Alice, Gold tier, with two Product records, an AI Camera and a Tripod. Product and UserProfile are C# records, which make convenient immutable data carriers; each lives in its own file, as does UserHelperPlugin. KernelArguments then gets four entries. Note that user is the whole UserProfile object, not a string: the template engine passes it straight to GetPurchaseList, matching the parameter type. Name and tier are simple strings for display, and tier also feeds the tier function. Then one InvokePromptAsync call does two jobs. First, highlighted, it renders the template, calling both plugin functions. Then it sends the finished prompt to the model.</a:t>
             </a:r>
             <a:endParaRPr lang="en-US" dirty="0"/>
           </a:p>
@@ -1392,7 +1392,7 @@
           <a:p>
             <a:r>
               <a:rPr lang="en-US" dirty="0"/>
-              <a:t>Set OPENAI_API_KEY and run the project. It prints the Processing Alice header, then the model's answer under AI Response. The reply on this slide is illustrative; the wording will differ from run to run. What you should see is the effect of the rendered prompt: an ultra-polite tone, the GOLD20 twenty percent discount code, and often a mention of the AI Camera or the Tripod from her purchase history. If a plugin or the API call fails, you'll see Request failed with the error message instead. Note that the header text says Built-in Plugins, although UserHelperPlugin is a native plugin we wrote ourselves.</a:t>
+              <a:t>Set OPENAI_API_KEY and run the project. It prints the Processing Alice header, then the model's answer under AI Response. The reply on this slide is illustrative; the wording will differ from run to run. What you should see is the effect of the rendered prompt: an ultra-polite tone, the GOLD20 twenty percent discount code, and often a mention of the AI Camera or the Tripod from her purchase history. If a plugin or the API call fails, you'll see Request failed with the error message instead.</a:t>
             </a:r>
             <a:endParaRPr lang="en-US" dirty="0"/>
           </a:p>
@@ -2897,7 +2897,7 @@
                 <a:ea typeface="Courier New" pitchFamily="34" charset="-122"/>
                 <a:cs typeface="Courier New" pitchFamily="34" charset="-120"/>
               </a:rPr>
-              <a:t>PromptLogicPlugins/Program.cs</a:t>
+              <a:t>PromptLogicPlugins/UserHelperPlugin.cs</a:t>
             </a:r>
             <a:endParaRPr lang="en-US" sz="850" dirty="0"/>
           </a:p>
@@ -10569,7 +10569,7 @@
                 <a:ea typeface="Courier New" pitchFamily="34" charset="-122"/>
                 <a:cs typeface="Courier New" pitchFamily="34" charset="-120"/>
               </a:rPr>
-              <a:t>--- Processing Alice via Built-in Plugins ---</a:t>
+              <a:t>--- Processing Alice via a Custom Native Plugin ---</a:t>
             </a:r>
             <a:endParaRPr lang="en-US" sz="1100" dirty="0"/>
           </a:p>
